--- a/pipeline_deck.pptx
+++ b/pipeline_deck.pptx
@@ -3411,7 +3411,7 @@
           <a:p>
             <a:r>
               <a:rPr sz="1200" b="0"/>
-              <a:t>0%</a:t>
+              <a:t>15%</a:t>
             </a:r>
           </a:p>
         </p:txBody>
@@ -3473,7 +3473,7 @@
           <a:p>
             <a:r>
               <a:rPr sz="1200" b="0"/>
-              <a:t>Globex 0 - Enterprise License</a:t>
+              <a:t>Acme Corp 1 - Enterprise License</a:t>
             </a:r>
           </a:p>
         </p:txBody>
@@ -3502,7 +3502,7 @@
           <a:p>
             <a:r>
               <a:rPr sz="1200" b="0"/>
-              <a:t>$527,232</a:t>
+              <a:t>$72,152</a:t>
             </a:r>
           </a:p>
         </p:txBody>
@@ -3531,7 +3531,7 @@
           <a:p>
             <a:r>
               <a:rPr sz="1200" b="0"/>
-              <a:t>2026-05-31</a:t>
+              <a:t>2026-06-25</a:t>
             </a:r>
           </a:p>
         </p:txBody>
@@ -3771,7 +3771,7 @@
           <a:p>
             <a:r>
               <a:rPr sz="1200" b="0"/>
-              <a:t>Acme Corp 1 - Enterprise License</a:t>
+              <a:t>Globex 0 - Enterprise License</a:t>
             </a:r>
           </a:p>
         </p:txBody>
@@ -3800,7 +3800,7 @@
           <a:p>
             <a:r>
               <a:rPr sz="1200" b="0"/>
-              <a:t>$72,152</a:t>
+              <a:t>$527,232</a:t>
             </a:r>
           </a:p>
         </p:txBody>
@@ -3829,7 +3829,7 @@
           <a:p>
             <a:r>
               <a:rPr sz="1200" b="0"/>
-              <a:t>2026-06-25</a:t>
+              <a:t>2026-05-31</a:t>
             </a:r>
           </a:p>
         </p:txBody>
@@ -4306,7 +4306,7 @@
           <a:p>
             <a:r>
               <a:rPr sz="2200" b="1"/>
-              <a:t>0%</a:t>
+              <a:t>15%</a:t>
             </a:r>
           </a:p>
         </p:txBody>
@@ -4368,7 +4368,7 @@
           <a:p>
             <a:r>
               <a:rPr sz="1300" b="0"/>
-              <a:t>Grace Davis might be disengaged. Key issues detected: (-30) Email silent 20.0 days — serious concern, (-10) Gong call sentiment below comfort zone (48.0/100), (-45) Pricing objection unresolved: generic | Pricing objection unresolved: generic | Pricing objection unresolved: generic, (-15) Economic buyer never on a call for a $484,997.0 deal, (-30) Single-threaded deal (2 ID signals) — extremely high risk, (-25) No upcoming touchpoint scheduled + closes this quarter — critical gap, (+5) Strategy doc exists in Notion. This requires immediate attention.</a:t>
+              <a:t>Grace Davis might be disengaged. Key issues detected: (-30) Email silent 20.0 days — serious concern, (-10) Gong call sentiment below comfort zone (48.0/100), (-45) Pricing objection unresolved: generic | Pricing objection unresolved: generic | Pricing objection unresolved: generic, (-15) Economic buyer never on a call for a $484,997.0 deal, (+10) Strongly multi-threaded (6 ID signals) — great engagement depth, (+5) Strategy doc exists in Notion. This requires immediate attention.</a:t>
             </a:r>
           </a:p>
         </p:txBody>
@@ -4415,7 +4415,7 @@
           <a:p>
             <a:r>
               <a:rPr sz="3200" b="1"/>
-              <a:t>Globex 0 - Enterprise License</a:t>
+              <a:t>Acme Corp 1 - Enterprise License</a:t>
             </a:r>
           </a:p>
         </p:txBody>
@@ -4510,7 +4510,7 @@
           <a:p>
             <a:r>
               <a:rPr sz="2200" b="1"/>
-              <a:t>$527,232</a:t>
+              <a:t>$72,152</a:t>
             </a:r>
           </a:p>
         </p:txBody>
@@ -4572,7 +4572,7 @@
           <a:p>
             <a:r>
               <a:rPr sz="2200" b="1"/>
-              <a:t>2026-05-31</a:t>
+              <a:t>2026-06-25</a:t>
             </a:r>
           </a:p>
         </p:txBody>
@@ -4696,7 +4696,7 @@
           <a:p>
             <a:r>
               <a:rPr sz="1300" b="0"/>
-              <a:t>Deal is progressing but has some friction: (+10) Gong call sentiment very positive (89.0/100), (-15) Pricing objection unresolved: generic, (+25) Economic buyer engaged on call — strong positive signal, (-30) Single-threaded deal (2 ID signals) — extremely high risk, (-25) No upcoming touchpoint scheduled + closes this quarter — critical gap, (+5) Strategy doc exists in Notion.</a:t>
+              <a:t>Deal is progressing but has some friction: (+10) Gong call sentiment very positive (83.0/100), (-15) Pricing objection unresolved: generic, (+25) Economic buyer engaged on call — strong positive signal, (-30) Single-threaded deal (2 ID signals) — extremely high risk, (-25) No upcoming touchpoint scheduled + closes this quarter — critical gap, (+5) Strategy doc exists in Notion.</a:t>
             </a:r>
           </a:p>
         </p:txBody>
@@ -5071,7 +5071,7 @@
           <a:p>
             <a:r>
               <a:rPr sz="3200" b="1"/>
-              <a:t>Acme Corp 1 - Enterprise License</a:t>
+              <a:t>Globex 0 - Enterprise License</a:t>
             </a:r>
           </a:p>
         </p:txBody>
@@ -5166,7 +5166,7 @@
           <a:p>
             <a:r>
               <a:rPr sz="2200" b="1"/>
-              <a:t>$72,152</a:t>
+              <a:t>$527,232</a:t>
             </a:r>
           </a:p>
         </p:txBody>
@@ -5228,7 +5228,7 @@
           <a:p>
             <a:r>
               <a:rPr sz="2200" b="1"/>
-              <a:t>2026-06-25</a:t>
+              <a:t>2026-05-31</a:t>
             </a:r>
           </a:p>
         </p:txBody>

--- a/pipeline_deck.pptx
+++ b/pipeline_deck.pptx
@@ -3324,7 +3324,7 @@
           <a:p>
             <a:r>
               <a:rPr sz="1200" b="0"/>
-              <a:t>Stark Industries 4 - Enterprise License</a:t>
+              <a:t>Oscorp 3 - Enterprise License</a:t>
             </a:r>
           </a:p>
         </p:txBody>
@@ -3353,7 +3353,7 @@
           <a:p>
             <a:r>
               <a:rPr sz="1200" b="0"/>
-              <a:t>$484,997</a:t>
+              <a:t>$52,374</a:t>
             </a:r>
           </a:p>
         </p:txBody>
@@ -3382,7 +3382,7 @@
           <a:p>
             <a:r>
               <a:rPr sz="1200" b="0"/>
-              <a:t>2026-07-13</a:t>
+              <a:t>2026-07-16</a:t>
             </a:r>
           </a:p>
         </p:txBody>
@@ -3411,7 +3411,7 @@
           <a:p>
             <a:r>
               <a:rPr sz="1200" b="0"/>
-              <a:t>15%</a:t>
+              <a:t>10%</a:t>
             </a:r>
           </a:p>
         </p:txBody>
@@ -3473,7 +3473,7 @@
           <a:p>
             <a:r>
               <a:rPr sz="1200" b="0"/>
-              <a:t>Acme Corp 1 - Enterprise License</a:t>
+              <a:t>Stark Industries 4 - Enterprise License</a:t>
             </a:r>
           </a:p>
         </p:txBody>
@@ -3502,7 +3502,7 @@
           <a:p>
             <a:r>
               <a:rPr sz="1200" b="0"/>
-              <a:t>$72,152</a:t>
+              <a:t>$484,997</a:t>
             </a:r>
           </a:p>
         </p:txBody>
@@ -3531,7 +3531,7 @@
           <a:p>
             <a:r>
               <a:rPr sz="1200" b="0"/>
-              <a:t>2026-06-25</a:t>
+              <a:t>2026-07-13</a:t>
             </a:r>
           </a:p>
         </p:txBody>
@@ -3560,6 +3560,155 @@
           <a:p>
             <a:r>
               <a:rPr sz="1200" b="0"/>
+              <a:t>15%</a:t>
+            </a:r>
+          </a:p>
+        </p:txBody>
+      </p:sp>
+      <p:sp>
+        <p:nvSpPr>
+          <p:cNvPr id="18" name="TextBox 17"/>
+          <p:cNvSpPr txBox="1"/>
+          <p:nvPr/>
+        </p:nvSpPr>
+        <p:spPr>
+          <a:xfrm>
+            <a:off x="9692640" y="2331720"/>
+            <a:ext cx="2286000" cy="411480"/>
+          </a:xfrm>
+          <a:prstGeom prst="rect">
+            <a:avLst/>
+          </a:prstGeom>
+          <a:noFill/>
+        </p:spPr>
+        <p:txBody>
+          <a:bodyPr wrap="square">
+            <a:spAutoFit/>
+          </a:bodyPr>
+          <a:lstStyle/>
+          <a:p>
+            <a:r>
+              <a:rPr sz="1200" b="1">
+                <a:solidFill>
+                  <a:srgbClr val="E53935"/>
+                </a:solidFill>
+              </a:rPr>
+              <a:t>RED</a:t>
+            </a:r>
+          </a:p>
+        </p:txBody>
+      </p:sp>
+      <p:sp>
+        <p:nvSpPr>
+          <p:cNvPr id="19" name="TextBox 18"/>
+          <p:cNvSpPr txBox="1"/>
+          <p:nvPr/>
+        </p:nvSpPr>
+        <p:spPr>
+          <a:xfrm>
+            <a:off x="365760" y="2834640"/>
+            <a:ext cx="3383280" cy="411480"/>
+          </a:xfrm>
+          <a:prstGeom prst="rect">
+            <a:avLst/>
+          </a:prstGeom>
+          <a:noFill/>
+        </p:spPr>
+        <p:txBody>
+          <a:bodyPr wrap="square">
+            <a:spAutoFit/>
+          </a:bodyPr>
+          <a:lstStyle/>
+          <a:p>
+            <a:r>
+              <a:rPr sz="1200" b="0"/>
+              <a:t>Globex 0 - Enterprise License</a:t>
+            </a:r>
+          </a:p>
+        </p:txBody>
+      </p:sp>
+      <p:sp>
+        <p:nvSpPr>
+          <p:cNvPr id="20" name="TextBox 19"/>
+          <p:cNvSpPr txBox="1"/>
+          <p:nvPr/>
+        </p:nvSpPr>
+        <p:spPr>
+          <a:xfrm>
+            <a:off x="3931920" y="2834640"/>
+            <a:ext cx="1737360" cy="411480"/>
+          </a:xfrm>
+          <a:prstGeom prst="rect">
+            <a:avLst/>
+          </a:prstGeom>
+          <a:noFill/>
+        </p:spPr>
+        <p:txBody>
+          <a:bodyPr wrap="square">
+            <a:spAutoFit/>
+          </a:bodyPr>
+          <a:lstStyle/>
+          <a:p>
+            <a:r>
+              <a:rPr sz="1200" b="0"/>
+              <a:t>$527,232</a:t>
+            </a:r>
+          </a:p>
+        </p:txBody>
+      </p:sp>
+      <p:sp>
+        <p:nvSpPr>
+          <p:cNvPr id="21" name="TextBox 20"/>
+          <p:cNvSpPr txBox="1"/>
+          <p:nvPr/>
+        </p:nvSpPr>
+        <p:spPr>
+          <a:xfrm>
+            <a:off x="5852160" y="2834640"/>
+            <a:ext cx="1737360" cy="411480"/>
+          </a:xfrm>
+          <a:prstGeom prst="rect">
+            <a:avLst/>
+          </a:prstGeom>
+          <a:noFill/>
+        </p:spPr>
+        <p:txBody>
+          <a:bodyPr wrap="square">
+            <a:spAutoFit/>
+          </a:bodyPr>
+          <a:lstStyle/>
+          <a:p>
+            <a:r>
+              <a:rPr sz="1200" b="0"/>
+              <a:t>2026-05-31</a:t>
+            </a:r>
+          </a:p>
+        </p:txBody>
+      </p:sp>
+      <p:sp>
+        <p:nvSpPr>
+          <p:cNvPr id="22" name="TextBox 21"/>
+          <p:cNvSpPr txBox="1"/>
+          <p:nvPr/>
+        </p:nvSpPr>
+        <p:spPr>
+          <a:xfrm>
+            <a:off x="7772400" y="2834640"/>
+            <a:ext cx="1737360" cy="411480"/>
+          </a:xfrm>
+          <a:prstGeom prst="rect">
+            <a:avLst/>
+          </a:prstGeom>
+          <a:noFill/>
+        </p:spPr>
+        <p:txBody>
+          <a:bodyPr wrap="square">
+            <a:spAutoFit/>
+          </a:bodyPr>
+          <a:lstStyle/>
+          <a:p>
+            <a:r>
+              <a:rPr sz="1200" b="0"/>
               <a:t>70%</a:t>
             </a:r>
           </a:p>
@@ -3567,13 +3716,13 @@
       </p:sp>
       <p:sp>
         <p:nvSpPr>
-          <p:cNvPr id="18" name="TextBox 17"/>
-          <p:cNvSpPr txBox="1"/>
-          <p:nvPr/>
-        </p:nvSpPr>
-        <p:spPr>
-          <a:xfrm>
-            <a:off x="9692640" y="2331720"/>
+          <p:cNvPr id="23" name="TextBox 22"/>
+          <p:cNvSpPr txBox="1"/>
+          <p:nvPr/>
+        </p:nvSpPr>
+        <p:spPr>
+          <a:xfrm>
+            <a:off x="9692640" y="2834640"/>
             <a:ext cx="2286000" cy="411480"/>
           </a:xfrm>
           <a:prstGeom prst="rect">
@@ -3600,13 +3749,13 @@
       </p:sp>
       <p:sp>
         <p:nvSpPr>
-          <p:cNvPr id="19" name="TextBox 18"/>
-          <p:cNvSpPr txBox="1"/>
-          <p:nvPr/>
-        </p:nvSpPr>
-        <p:spPr>
-          <a:xfrm>
-            <a:off x="365760" y="2834640"/>
+          <p:cNvPr id="24" name="TextBox 23"/>
+          <p:cNvSpPr txBox="1"/>
+          <p:nvPr/>
+        </p:nvSpPr>
+        <p:spPr>
+          <a:xfrm>
+            <a:off x="365760" y="3337560"/>
             <a:ext cx="3383280" cy="411480"/>
           </a:xfrm>
           <a:prstGeom prst="rect">
@@ -3622,20 +3771,20 @@
           <a:p>
             <a:r>
               <a:rPr sz="1200" b="0"/>
-              <a:t>Oscorp 3 - Enterprise License</a:t>
-            </a:r>
-          </a:p>
-        </p:txBody>
-      </p:sp>
-      <p:sp>
-        <p:nvSpPr>
-          <p:cNvPr id="20" name="TextBox 19"/>
-          <p:cNvSpPr txBox="1"/>
-          <p:nvPr/>
-        </p:nvSpPr>
-        <p:spPr>
-          <a:xfrm>
-            <a:off x="3931920" y="2834640"/>
+              <a:t>Acme Corp 1 - Enterprise License</a:t>
+            </a:r>
+          </a:p>
+        </p:txBody>
+      </p:sp>
+      <p:sp>
+        <p:nvSpPr>
+          <p:cNvPr id="25" name="TextBox 24"/>
+          <p:cNvSpPr txBox="1"/>
+          <p:nvPr/>
+        </p:nvSpPr>
+        <p:spPr>
+          <a:xfrm>
+            <a:off x="3931920" y="3337560"/>
             <a:ext cx="1737360" cy="411480"/>
           </a:xfrm>
           <a:prstGeom prst="rect">
@@ -3651,20 +3800,20 @@
           <a:p>
             <a:r>
               <a:rPr sz="1200" b="0"/>
-              <a:t>$52,374</a:t>
-            </a:r>
-          </a:p>
-        </p:txBody>
-      </p:sp>
-      <p:sp>
-        <p:nvSpPr>
-          <p:cNvPr id="21" name="TextBox 20"/>
-          <p:cNvSpPr txBox="1"/>
-          <p:nvPr/>
-        </p:nvSpPr>
-        <p:spPr>
-          <a:xfrm>
-            <a:off x="5852160" y="2834640"/>
+              <a:t>$72,152</a:t>
+            </a:r>
+          </a:p>
+        </p:txBody>
+      </p:sp>
+      <p:sp>
+        <p:nvSpPr>
+          <p:cNvPr id="26" name="TextBox 25"/>
+          <p:cNvSpPr txBox="1"/>
+          <p:nvPr/>
+        </p:nvSpPr>
+        <p:spPr>
+          <a:xfrm>
+            <a:off x="5852160" y="3337560"/>
             <a:ext cx="1737360" cy="411480"/>
           </a:xfrm>
           <a:prstGeom prst="rect">
@@ -3680,20 +3829,20 @@
           <a:p>
             <a:r>
               <a:rPr sz="1200" b="0"/>
-              <a:t>2026-07-16</a:t>
-            </a:r>
-          </a:p>
-        </p:txBody>
-      </p:sp>
-      <p:sp>
-        <p:nvSpPr>
-          <p:cNvPr id="22" name="TextBox 21"/>
-          <p:cNvSpPr txBox="1"/>
-          <p:nvPr/>
-        </p:nvSpPr>
-        <p:spPr>
-          <a:xfrm>
-            <a:off x="7772400" y="2834640"/>
+              <a:t>2026-06-25</a:t>
+            </a:r>
+          </a:p>
+        </p:txBody>
+      </p:sp>
+      <p:sp>
+        <p:nvSpPr>
+          <p:cNvPr id="27" name="TextBox 26"/>
+          <p:cNvSpPr txBox="1"/>
+          <p:nvPr/>
+        </p:nvSpPr>
+        <p:spPr>
+          <a:xfrm>
+            <a:off x="7772400" y="3337560"/>
             <a:ext cx="1737360" cy="411480"/>
           </a:xfrm>
           <a:prstGeom prst="rect">
@@ -3709,20 +3858,20 @@
           <a:p>
             <a:r>
               <a:rPr sz="1200" b="0"/>
-              <a:t>75%</a:t>
-            </a:r>
-          </a:p>
-        </p:txBody>
-      </p:sp>
-      <p:sp>
-        <p:nvSpPr>
-          <p:cNvPr id="23" name="TextBox 22"/>
-          <p:cNvSpPr txBox="1"/>
-          <p:nvPr/>
-        </p:nvSpPr>
-        <p:spPr>
-          <a:xfrm>
-            <a:off x="9692640" y="2834640"/>
+              <a:t>70%</a:t>
+            </a:r>
+          </a:p>
+        </p:txBody>
+      </p:sp>
+      <p:sp>
+        <p:nvSpPr>
+          <p:cNvPr id="28" name="TextBox 27"/>
+          <p:cNvSpPr txBox="1"/>
+          <p:nvPr/>
+        </p:nvSpPr>
+        <p:spPr>
+          <a:xfrm>
+            <a:off x="9692640" y="3337560"/>
             <a:ext cx="2286000" cy="411480"/>
           </a:xfrm>
           <a:prstGeom prst="rect">
@@ -3739,159 +3888,10 @@
             <a:r>
               <a:rPr sz="1200" b="1">
                 <a:solidFill>
-                  <a:srgbClr val="1DB954"/>
+                  <a:srgbClr val="F5A623"/>
                 </a:solidFill>
               </a:rPr>
-              <a:t>GREEN</a:t>
-            </a:r>
-          </a:p>
-        </p:txBody>
-      </p:sp>
-      <p:sp>
-        <p:nvSpPr>
-          <p:cNvPr id="24" name="TextBox 23"/>
-          <p:cNvSpPr txBox="1"/>
-          <p:nvPr/>
-        </p:nvSpPr>
-        <p:spPr>
-          <a:xfrm>
-            <a:off x="365760" y="3337560"/>
-            <a:ext cx="3383280" cy="411480"/>
-          </a:xfrm>
-          <a:prstGeom prst="rect">
-            <a:avLst/>
-          </a:prstGeom>
-          <a:noFill/>
-        </p:spPr>
-        <p:txBody>
-          <a:bodyPr wrap="square">
-            <a:spAutoFit/>
-          </a:bodyPr>
-          <a:lstStyle/>
-          <a:p>
-            <a:r>
-              <a:rPr sz="1200" b="0"/>
-              <a:t>Globex 0 - Enterprise License</a:t>
-            </a:r>
-          </a:p>
-        </p:txBody>
-      </p:sp>
-      <p:sp>
-        <p:nvSpPr>
-          <p:cNvPr id="25" name="TextBox 24"/>
-          <p:cNvSpPr txBox="1"/>
-          <p:nvPr/>
-        </p:nvSpPr>
-        <p:spPr>
-          <a:xfrm>
-            <a:off x="3931920" y="3337560"/>
-            <a:ext cx="1737360" cy="411480"/>
-          </a:xfrm>
-          <a:prstGeom prst="rect">
-            <a:avLst/>
-          </a:prstGeom>
-          <a:noFill/>
-        </p:spPr>
-        <p:txBody>
-          <a:bodyPr wrap="square">
-            <a:spAutoFit/>
-          </a:bodyPr>
-          <a:lstStyle/>
-          <a:p>
-            <a:r>
-              <a:rPr sz="1200" b="0"/>
-              <a:t>$527,232</a:t>
-            </a:r>
-          </a:p>
-        </p:txBody>
-      </p:sp>
-      <p:sp>
-        <p:nvSpPr>
-          <p:cNvPr id="26" name="TextBox 25"/>
-          <p:cNvSpPr txBox="1"/>
-          <p:nvPr/>
-        </p:nvSpPr>
-        <p:spPr>
-          <a:xfrm>
-            <a:off x="5852160" y="3337560"/>
-            <a:ext cx="1737360" cy="411480"/>
-          </a:xfrm>
-          <a:prstGeom prst="rect">
-            <a:avLst/>
-          </a:prstGeom>
-          <a:noFill/>
-        </p:spPr>
-        <p:txBody>
-          <a:bodyPr wrap="square">
-            <a:spAutoFit/>
-          </a:bodyPr>
-          <a:lstStyle/>
-          <a:p>
-            <a:r>
-              <a:rPr sz="1200" b="0"/>
-              <a:t>2026-05-31</a:t>
-            </a:r>
-          </a:p>
-        </p:txBody>
-      </p:sp>
-      <p:sp>
-        <p:nvSpPr>
-          <p:cNvPr id="27" name="TextBox 26"/>
-          <p:cNvSpPr txBox="1"/>
-          <p:nvPr/>
-        </p:nvSpPr>
-        <p:spPr>
-          <a:xfrm>
-            <a:off x="7772400" y="3337560"/>
-            <a:ext cx="1737360" cy="411480"/>
-          </a:xfrm>
-          <a:prstGeom prst="rect">
-            <a:avLst/>
-          </a:prstGeom>
-          <a:noFill/>
-        </p:spPr>
-        <p:txBody>
-          <a:bodyPr wrap="square">
-            <a:spAutoFit/>
-          </a:bodyPr>
-          <a:lstStyle/>
-          <a:p>
-            <a:r>
-              <a:rPr sz="1200" b="0"/>
-              <a:t>100%</a:t>
-            </a:r>
-          </a:p>
-        </p:txBody>
-      </p:sp>
-      <p:sp>
-        <p:nvSpPr>
-          <p:cNvPr id="28" name="TextBox 27"/>
-          <p:cNvSpPr txBox="1"/>
-          <p:nvPr/>
-        </p:nvSpPr>
-        <p:spPr>
-          <a:xfrm>
-            <a:off x="9692640" y="3337560"/>
-            <a:ext cx="2286000" cy="411480"/>
-          </a:xfrm>
-          <a:prstGeom prst="rect">
-            <a:avLst/>
-          </a:prstGeom>
-          <a:noFill/>
-        </p:spPr>
-        <p:txBody>
-          <a:bodyPr wrap="square">
-            <a:spAutoFit/>
-          </a:bodyPr>
-          <a:lstStyle/>
-          <a:p>
-            <a:r>
-              <a:rPr sz="1200" b="1">
-                <a:solidFill>
-                  <a:srgbClr val="1DB954"/>
-                </a:solidFill>
-              </a:rPr>
-              <a:t>GREEN</a:t>
+              <a:t>AMBER</a:t>
             </a:r>
           </a:p>
         </p:txBody>
@@ -4087,7 +4087,7 @@
           <a:p>
             <a:r>
               <a:rPr sz="3200" b="1"/>
-              <a:t>Stark Industries 4 - Enterprise License</a:t>
+              <a:t>Oscorp 3 - Enterprise License</a:t>
             </a:r>
           </a:p>
         </p:txBody>
@@ -4182,7 +4182,7 @@
           <a:p>
             <a:r>
               <a:rPr sz="2200" b="1"/>
-              <a:t>$484,997</a:t>
+              <a:t>$52,374</a:t>
             </a:r>
           </a:p>
         </p:txBody>
@@ -4244,7 +4244,7 @@
           <a:p>
             <a:r>
               <a:rPr sz="2200" b="1"/>
-              <a:t>2026-07-13</a:t>
+              <a:t>2026-07-16</a:t>
             </a:r>
           </a:p>
         </p:txBody>
@@ -4306,7 +4306,7 @@
           <a:p>
             <a:r>
               <a:rPr sz="2200" b="1"/>
-              <a:t>15%</a:t>
+              <a:t>10%</a:t>
             </a:r>
           </a:p>
         </p:txBody>
@@ -4368,7 +4368,7 @@
           <a:p>
             <a:r>
               <a:rPr sz="1300" b="0"/>
-              <a:t>Grace Davis might be disengaged. Key issues detected: (-30) Email silent 20.0 days — serious concern, (-10) Gong call sentiment below comfort zone (48.0/100), (-45) Pricing objection unresolved: generic | Pricing objection unresolved: generic | Pricing objection unresolved: generic, (-15) Economic buyer never on a call for a $484,997.0 deal, (+10) Strongly multi-threaded (6 ID signals) — great engagement depth, (+5) Strategy doc exists in Notion. This requires immediate attention.</a:t>
+              <a:t>John Taylor might be disengaged. Key issues detected: (-10) Email silent 8.0 days — mild concern, (-30) Champion changed jobs — deal lost its internal driver, (-15) Pricing objection unresolved: generic, (+25) Economic buyer engaged on call — strong positive signal, (-10) Legal waiting 10 days, (-30) Single-threaded deal (2 ID signals) — extremely high risk, (-25) No upcoming touchpoint scheduled + closes this quarter — critical gap, (+5) Strategy doc exists in Notion. This requires immediate attention.</a:t>
             </a:r>
           </a:p>
         </p:txBody>
@@ -4415,7 +4415,7 @@
           <a:p>
             <a:r>
               <a:rPr sz="3200" b="1"/>
-              <a:t>Acme Corp 1 - Enterprise License</a:t>
+              <a:t>Stark Industries 4 - Enterprise License</a:t>
             </a:r>
           </a:p>
         </p:txBody>
@@ -4445,10 +4445,10 @@
             <a:r>
               <a:rPr sz="1600" b="1">
                 <a:solidFill>
-                  <a:srgbClr val="F5A623"/>
+                  <a:srgbClr val="E53935"/>
                 </a:solidFill>
               </a:rPr>
-              <a:t>AMBER</a:t>
+              <a:t>RED</a:t>
             </a:r>
           </a:p>
         </p:txBody>
@@ -4510,7 +4510,7 @@
           <a:p>
             <a:r>
               <a:rPr sz="2200" b="1"/>
-              <a:t>$72,152</a:t>
+              <a:t>$484,997</a:t>
             </a:r>
           </a:p>
         </p:txBody>
@@ -4572,7 +4572,7 @@
           <a:p>
             <a:r>
               <a:rPr sz="2200" b="1"/>
-              <a:t>2026-06-25</a:t>
+              <a:t>2026-07-13</a:t>
             </a:r>
           </a:p>
         </p:txBody>
@@ -4634,7 +4634,7 @@
           <a:p>
             <a:r>
               <a:rPr sz="2200" b="1"/>
-              <a:t>70%</a:t>
+              <a:t>15%</a:t>
             </a:r>
           </a:p>
         </p:txBody>
@@ -4664,7 +4664,7 @@
             <a:r>
               <a:rPr sz="1100" b="1">
                 <a:solidFill>
-                  <a:srgbClr val="F5A623"/>
+                  <a:srgbClr val="E53935"/>
                 </a:solidFill>
               </a:rPr>
               <a:t>DEAL SUMMARY</a:t>
@@ -4696,7 +4696,7 @@
           <a:p>
             <a:r>
               <a:rPr sz="1300" b="0"/>
-              <a:t>Deal is progressing but has some friction: (+10) Gong call sentiment very positive (83.0/100), (-15) Pricing objection unresolved: generic, (+25) Economic buyer engaged on call — strong positive signal, (-30) Single-threaded deal (2 ID signals) — extremely high risk, (-25) No upcoming touchpoint scheduled + closes this quarter — critical gap, (+5) Strategy doc exists in Notion.</a:t>
+              <a:t>Grace Davis might be disengaged. Key issues detected: (-30) Email silent 20.0 days — serious concern, (-10) Gong call sentiment below comfort zone (48.0/100), (-45) Pricing objection unresolved: generic | Pricing objection unresolved: generic | Pricing objection unresolved: generic, (-15) Economic buyer never on a call for a $484,997.0 deal, (+10) Strongly multi-threaded (6 ID signals) — great engagement depth, (+5) Strategy doc exists in Notion. This requires immediate attention.</a:t>
             </a:r>
           </a:p>
         </p:txBody>
@@ -4743,7 +4743,7 @@
           <a:p>
             <a:r>
               <a:rPr sz="3200" b="1"/>
-              <a:t>Oscorp 3 - Enterprise License</a:t>
+              <a:t>Globex 0 - Enterprise License</a:t>
             </a:r>
           </a:p>
         </p:txBody>
@@ -4773,10 +4773,10 @@
             <a:r>
               <a:rPr sz="1600" b="1">
                 <a:solidFill>
-                  <a:srgbClr val="1DB954"/>
+                  <a:srgbClr val="F5A623"/>
                 </a:solidFill>
               </a:rPr>
-              <a:t>GREEN</a:t>
+              <a:t>AMBER</a:t>
             </a:r>
           </a:p>
         </p:txBody>
@@ -4838,7 +4838,7 @@
           <a:p>
             <a:r>
               <a:rPr sz="2200" b="1"/>
-              <a:t>$52,374</a:t>
+              <a:t>$527,232</a:t>
             </a:r>
           </a:p>
         </p:txBody>
@@ -4900,7 +4900,7 @@
           <a:p>
             <a:r>
               <a:rPr sz="2200" b="1"/>
-              <a:t>2026-07-16</a:t>
+              <a:t>2026-05-31</a:t>
             </a:r>
           </a:p>
         </p:txBody>
@@ -4962,7 +4962,7 @@
           <a:p>
             <a:r>
               <a:rPr sz="2200" b="1"/>
-              <a:t>75%</a:t>
+              <a:t>70%</a:t>
             </a:r>
           </a:p>
         </p:txBody>
@@ -4992,7 +4992,7 @@
             <a:r>
               <a:rPr sz="1100" b="1">
                 <a:solidFill>
-                  <a:srgbClr val="1DB954"/>
+                  <a:srgbClr val="F5A623"/>
                 </a:solidFill>
               </a:rPr>
               <a:t>DEAL SUMMARY</a:t>
@@ -5024,7 +5024,7 @@
           <a:p>
             <a:r>
               <a:rPr sz="1300" b="0"/>
-              <a:t>Deal is healthy and on track. Engagement is strong.</a:t>
+              <a:t>Deal is progressing but has some friction: (+10) Gong call sentiment very positive (89.0/100), (-15) Pricing objection unresolved: generic, (+25) Economic buyer engaged on call — strong positive signal, (-30) Single-threaded deal (2 ID signals) — extremely high risk, (-25) No upcoming touchpoint scheduled + closes this quarter — critical gap, (+5) Strategy doc exists in Notion.</a:t>
             </a:r>
           </a:p>
         </p:txBody>
@@ -5071,7 +5071,7 @@
           <a:p>
             <a:r>
               <a:rPr sz="3200" b="1"/>
-              <a:t>Globex 0 - Enterprise License</a:t>
+              <a:t>Acme Corp 1 - Enterprise License</a:t>
             </a:r>
           </a:p>
         </p:txBody>
@@ -5101,10 +5101,10 @@
             <a:r>
               <a:rPr sz="1600" b="1">
                 <a:solidFill>
-                  <a:srgbClr val="1DB954"/>
+                  <a:srgbClr val="F5A623"/>
                 </a:solidFill>
               </a:rPr>
-              <a:t>GREEN</a:t>
+              <a:t>AMBER</a:t>
             </a:r>
           </a:p>
         </p:txBody>
@@ -5166,7 +5166,7 @@
           <a:p>
             <a:r>
               <a:rPr sz="2200" b="1"/>
-              <a:t>$527,232</a:t>
+              <a:t>$72,152</a:t>
             </a:r>
           </a:p>
         </p:txBody>
@@ -5228,7 +5228,7 @@
           <a:p>
             <a:r>
               <a:rPr sz="2200" b="1"/>
-              <a:t>2026-05-31</a:t>
+              <a:t>2026-06-25</a:t>
             </a:r>
           </a:p>
         </p:txBody>
@@ -5290,7 +5290,7 @@
           <a:p>
             <a:r>
               <a:rPr sz="2200" b="1"/>
-              <a:t>100%</a:t>
+              <a:t>70%</a:t>
             </a:r>
           </a:p>
         </p:txBody>
@@ -5320,7 +5320,7 @@
             <a:r>
               <a:rPr sz="1100" b="1">
                 <a:solidFill>
-                  <a:srgbClr val="1DB954"/>
+                  <a:srgbClr val="F5A623"/>
                 </a:solidFill>
               </a:rPr>
               <a:t>DEAL SUMMARY</a:t>
@@ -5352,7 +5352,7 @@
           <a:p>
             <a:r>
               <a:rPr sz="1300" b="0"/>
-              <a:t>Deal is healthy and on track. Engagement is strong.</a:t>
+              <a:t>Deal is progressing but has some friction: (+10) Gong call sentiment very positive (83.0/100), (-15) Pricing objection unresolved: generic, (+25) Economic buyer engaged on call — strong positive signal, (-30) Single-threaded deal (2 ID signals) — extremely high risk, (-25) No upcoming touchpoint scheduled + closes this quarter — critical gap, (+5) Strategy doc exists in Notion.</a:t>
             </a:r>
           </a:p>
         </p:txBody>
